--- a/Pillar4-Checking-for-Understanding-facilitator-deck.pptx
+++ b/Pillar4-Checking-for-Understanding-facilitator-deck.pptx
@@ -5382,7 +5382,7 @@
                 <a:ea typeface="Century Gothic" pitchFamily="34" charset="-122"/>
                 <a:cs typeface="Century Gothic" pitchFamily="34" charset="-120"/>
               </a:rPr>
-              <a:t>All-pupil response is the inclusion</a:t>
+              <a:t>Why checking everyone reaches every pupil</a:t>
             </a:r>
             <a:endParaRPr lang="en-US" sz="2700" dirty="0"/>
           </a:p>
@@ -7253,7 +7253,7 @@
                 <a:ea typeface="Century Gothic" pitchFamily="34" charset="-122"/>
                 <a:cs typeface="Century Gothic" pitchFamily="34" charset="-120"/>
               </a:rPr>
-              <a:t>Subject teams</a:t>
+              <a:t>Class teams</a:t>
             </a:r>
             <a:endParaRPr lang="en-US" sz="1350" dirty="0"/>
           </a:p>
@@ -7273,7 +7273,7 @@
                 <a:ea typeface="Century Gothic" pitchFamily="34" charset="-122"/>
                 <a:cs typeface="Century Gothic" pitchFamily="34" charset="-120"/>
               </a:rPr>
-              <a:t>adapting each method to the subject</a:t>
+              <a:t>adapting each method to your class</a:t>
             </a:r>
             <a:endParaRPr lang="en-US" sz="1350" dirty="0"/>
           </a:p>
@@ -8133,7 +8133,7 @@
                 <a:ea typeface="Century Gothic" pitchFamily="34" charset="-122"/>
                 <a:cs typeface="Century Gothic" pitchFamily="34" charset="-120"/>
               </a:rPr>
-              <a:t>Two ways to check a class</a:t>
+              <a:t>Knowing what the class understands</a:t>
             </a:r>
             <a:endParaRPr lang="en-US" sz="2700" dirty="0"/>
           </a:p>
@@ -8241,7 +8241,7 @@
                 <a:ea typeface="Century Gothic" pitchFamily="34" charset="-122"/>
                 <a:cs typeface="Century Gothic" pitchFamily="34" charset="-120"/>
               </a:rPr>
-              <a:t>The question that gathers nothing</a:t>
+              <a:t>Asking 'does everyone understand?'</a:t>
             </a:r>
             <a:endParaRPr lang="en-US" sz="1600" dirty="0"/>
           </a:p>
@@ -8455,7 +8455,7 @@
                 <a:ea typeface="Century Gothic" pitchFamily="34" charset="-122"/>
                 <a:cs typeface="Century Gothic" pitchFamily="34" charset="-120"/>
               </a:rPr>
-              <a:t>The check with an answer</a:t>
+              <a:t>A check every pupil answers</a:t>
             </a:r>
             <a:endParaRPr lang="en-US" sz="1600" dirty="0"/>
           </a:p>
@@ -8886,7 +8886,7 @@
                 <a:ea typeface="Century Gothic" pitchFamily="34" charset="-122"/>
                 <a:cs typeface="Century Gothic" pitchFamily="34" charset="-120"/>
               </a:rPr>
-              <a:t>The check is not a pause in the teaching. It is the steering.  </a:t>
+              <a:t>Checking is how a teacher decides what to do next.  </a:t>
             </a:r>
             <a:pPr indent="0" marL="0">
               <a:buNone/>
@@ -9056,7 +9056,7 @@
                 <a:ea typeface="Century Gothic" pitchFamily="34" charset="-122"/>
                 <a:cs typeface="Century Gothic" pitchFamily="34" charset="-120"/>
               </a:rPr>
-              <a:t>Four ideas that carry the pillar</a:t>
+              <a:t>Four ideas behind the pillar</a:t>
             </a:r>
             <a:endParaRPr lang="en-US" sz="2700" dirty="0"/>
           </a:p>
@@ -11603,7 +11603,7 @@
                 <a:ea typeface="Century Gothic" pitchFamily="34" charset="-122"/>
                 <a:cs typeface="Century Gothic" pitchFamily="34" charset="-120"/>
               </a:rPr>
-              <a:t>Checking is diligence made visible</a:t>
+              <a:t>Checking and the virtue of diligence</a:t>
             </a:r>
             <a:endParaRPr lang="en-US" sz="2700" dirty="0"/>
           </a:p>

--- a/Pillar4-Checking-for-Understanding-facilitator-deck.pptx
+++ b/Pillar4-Checking-for-Understanding-facilitator-deck.pptx
@@ -12036,7 +12036,7 @@
     </a:clrScheme>
     <a:fontScheme name="Office">
       <a:majorFont>
-        <a:latin typeface="Calibri Light" panose="020F0302020204030204"/>
+        <a:latin typeface="Century Gothic" panose="020F0302020204030204"/>
         <a:ea typeface=""/>
         <a:cs typeface=""/>
         <a:font script="Jpan" typeface="游ゴシック Light"/>
@@ -12088,7 +12088,7 @@
         <a:font script="Tfng" typeface="Ebrima"/>
       </a:majorFont>
       <a:minorFont>
-        <a:latin typeface="Calibri" panose="020F0502020204030204"/>
+        <a:latin typeface="Century Gothic" panose="020F0502020204030204"/>
         <a:ea typeface=""/>
         <a:cs typeface=""/>
         <a:font script="Jpan" typeface="游ゴシック"/>
